--- a/_shape_test.pptx
+++ b/_shape_test.pptx
@@ -3160,6 +3160,7 @@
                 <a:solidFill>
                   <a:srgbClr val="1A1A1A"/>
                 </a:solidFill>
+                <a:latin typeface="Paperlogy 9 Black"/>
               </a:rPr>
               <a:t>수주</a:t>
             </a:r>
@@ -3171,6 +3172,7 @@
                 <a:solidFill>
                   <a:srgbClr val="1A1A1A"/>
                 </a:solidFill>
+                <a:latin typeface="Paperlogy 9 Black"/>
               </a:rPr>
               <a:t>에이전트 AI</a:t>
             </a:r>
@@ -3182,6 +3184,7 @@
                 <a:solidFill>
                   <a:srgbClr val="1A1A1A"/>
                 </a:solidFill>
+                <a:latin typeface="Paperlogy 9 Black"/>
               </a:rPr>
               <a:t>서비스소개서</a:t>
             </a:r>
@@ -3251,6 +3254,7 @@
                 <a:solidFill>
                   <a:srgbClr val="444444"/>
                 </a:solidFill>
+                <a:latin typeface="Paperlogy 6 SemiBold"/>
               </a:rPr>
               <a:t>RFP 분석부터 발표 Q&amp;A까지</a:t>
             </a:r>
@@ -3285,6 +3289,7 @@
                 <a:solidFill>
                   <a:srgbClr val="1A1A1A"/>
                 </a:solidFill>
+                <a:latin typeface="Paperlogy 9 Black"/>
               </a:rPr>
               <a:t>7</a:t>
             </a:r>
@@ -3319,6 +3324,7 @@
                 <a:solidFill>
                   <a:srgbClr val="666666"/>
                 </a:solidFill>
+                <a:latin typeface="Paperlogy 4 Regular"/>
               </a:rPr>
               <a:t>단계  ·  AI 파이프라인</a:t>
             </a:r>
@@ -3388,6 +3394,7 @@
                 <a:solidFill>
                   <a:srgbClr val="1A1A1A"/>
                 </a:solidFill>
+                <a:latin typeface="Paperlogy 9 Black"/>
               </a:rPr>
               <a:t>28</a:t>
             </a:r>
@@ -3422,6 +3429,7 @@
                 <a:solidFill>
                   <a:srgbClr val="666666"/>
                 </a:solidFill>
+                <a:latin typeface="Paperlogy 4 Regular"/>
               </a:rPr>
               <a:t>개  ·  AI 에이전트</a:t>
             </a:r>
@@ -3491,6 +3499,7 @@
                 <a:solidFill>
                   <a:srgbClr val="999999"/>
                 </a:solidFill>
+                <a:latin typeface="Paperlogy 6 SemiBold"/>
               </a:rPr>
               <a:t>NIGHTOFF</a:t>
             </a:r>
@@ -3525,6 +3534,7 @@
                 <a:solidFill>
                   <a:srgbClr val="999999"/>
                 </a:solidFill>
+                <a:latin typeface="Paperlogy 4 Regular"/>
               </a:rPr>
               <a:t>01 / 02</a:t>
             </a:r>
@@ -3577,6 +3587,7 @@
                 <a:solidFill>
                   <a:srgbClr val="1A1A1A"/>
                 </a:solidFill>
+                <a:latin typeface="Paperlogy 8 ExtraBold"/>
               </a:rPr>
               <a:t>서비스 프로세스 — 고객사 입장에서 어떻게 진행되는가</a:t>
             </a:r>
@@ -3611,6 +3622,7 @@
                 <a:solidFill>
                   <a:srgbClr val="666666"/>
                 </a:solidFill>
+                <a:latin typeface="Paperlogy 4 Regular"/>
               </a:rPr>
               <a:t>당신은 수행에 집중, 기회 발굴과 수주는 저희가</a:t>
             </a:r>
@@ -3688,6 +3700,7 @@
                 <a:solidFill>
                   <a:srgbClr val="FFFFFF"/>
                 </a:solidFill>
+                <a:latin typeface="Paperlogy 7 Bold"/>
               </a:rPr>
               <a:t>1</a:t>
             </a:r>
@@ -3722,6 +3735,7 @@
                 <a:solidFill>
                   <a:srgbClr val="1A1A1A"/>
                 </a:solidFill>
+                <a:latin typeface="Paperlogy 7 Bold"/>
               </a:rPr>
               <a:t>RFP 공유</a:t>
             </a:r>
@@ -3756,6 +3770,7 @@
                 <a:solidFill>
                   <a:srgbClr val="666666"/>
                 </a:solidFill>
+                <a:latin typeface="Paperlogy 4 Regular"/>
               </a:rPr>
               <a:t>수 초</a:t>
             </a:r>
@@ -3833,6 +3848,7 @@
                 <a:solidFill>
                   <a:srgbClr val="FFFFFF"/>
                 </a:solidFill>
+                <a:latin typeface="Paperlogy 7 Bold"/>
               </a:rPr>
               <a:t>2</a:t>
             </a:r>
@@ -3867,6 +3883,7 @@
                 <a:solidFill>
                   <a:srgbClr val="1A1A1A"/>
                 </a:solidFill>
+                <a:latin typeface="Paperlogy 7 Bold"/>
               </a:rPr>
               <a:t>자동 분석</a:t>
             </a:r>
@@ -3901,6 +3918,7 @@
                 <a:solidFill>
                   <a:srgbClr val="666666"/>
                 </a:solidFill>
+                <a:latin typeface="Paperlogy 4 Regular"/>
               </a:rPr>
               <a:t>수 시간</a:t>
             </a:r>
@@ -3978,6 +3996,7 @@
                 <a:solidFill>
                   <a:srgbClr val="FFFFFF"/>
                 </a:solidFill>
+                <a:latin typeface="Paperlogy 7 Bold"/>
               </a:rPr>
               <a:t>3</a:t>
             </a:r>
@@ -4012,6 +4031,7 @@
                 <a:solidFill>
                   <a:srgbClr val="1A1A1A"/>
                 </a:solidFill>
+                <a:latin typeface="Paperlogy 7 Bold"/>
               </a:rPr>
               <a:t>전략 확인</a:t>
             </a:r>
@@ -4046,6 +4066,7 @@
                 <a:solidFill>
                   <a:srgbClr val="666666"/>
                 </a:solidFill>
+                <a:latin typeface="Paperlogy 4 Regular"/>
               </a:rPr>
               <a:t>30분</a:t>
             </a:r>
@@ -4123,6 +4144,7 @@
                 <a:solidFill>
                   <a:srgbClr val="FFFFFF"/>
                 </a:solidFill>
+                <a:latin typeface="Paperlogy 7 Bold"/>
               </a:rPr>
               <a:t>4</a:t>
             </a:r>
@@ -4157,6 +4179,7 @@
                 <a:solidFill>
                   <a:srgbClr val="1A1A1A"/>
                 </a:solidFill>
+                <a:latin typeface="Paperlogy 7 Bold"/>
               </a:rPr>
               <a:t>초안 검토</a:t>
             </a:r>
@@ -4191,6 +4214,7 @@
                 <a:solidFill>
                   <a:srgbClr val="666666"/>
                 </a:solidFill>
+                <a:latin typeface="Paperlogy 4 Regular"/>
               </a:rPr>
               <a:t>1~2일</a:t>
             </a:r>
@@ -4268,6 +4292,7 @@
                 <a:solidFill>
                   <a:srgbClr val="FFFFFF"/>
                 </a:solidFill>
+                <a:latin typeface="Paperlogy 7 Bold"/>
               </a:rPr>
               <a:t>5</a:t>
             </a:r>
@@ -4302,6 +4327,7 @@
                 <a:solidFill>
                   <a:srgbClr val="1A1A1A"/>
                 </a:solidFill>
+                <a:latin typeface="Paperlogy 7 Bold"/>
               </a:rPr>
               <a:t>납품</a:t>
             </a:r>
@@ -4336,6 +4362,7 @@
                 <a:solidFill>
                   <a:srgbClr val="666666"/>
                 </a:solidFill>
+                <a:latin typeface="Paperlogy 4 Regular"/>
               </a:rPr>
               <a:t>D-Day</a:t>
             </a:r>
@@ -4477,6 +4504,7 @@
                 <a:solidFill>
                   <a:srgbClr val="999999"/>
                 </a:solidFill>
+                <a:latin typeface="Paperlogy 6 SemiBold"/>
               </a:rPr>
               <a:t>NIGHTOFF</a:t>
             </a:r>
@@ -4511,6 +4539,7 @@
                 <a:solidFill>
                   <a:srgbClr val="999999"/>
                 </a:solidFill>
+                <a:latin typeface="Paperlogy 4 Regular"/>
               </a:rPr>
               <a:t>02 / 02</a:t>
             </a:r>
